--- a/open-research-tools/r-part-I/r-part-I-slides.pptx
+++ b/open-research-tools/r-part-I/r-part-I-slides.pptx
@@ -27257,96 +27257,87 @@
             </a:r>
             <a:r>
               <a:rPr/>
-              <a:t> and is licenced under a </a:t>
+              <a:t>. His work was subsequently adapted by </a:t>
             </a:r>
             <a:r>
               <a:rPr>
                 <a:hlinkClick r:id="rId4"/>
               </a:rPr>
+              <a:t>Caterina Luz Sanchez Steinhagen</a:t>
+            </a:r>
+            <a:r>
+              <a:rPr/>
+              <a:t>, </a:t>
+            </a:r>
+            <a:r>
+              <a:rPr>
+                <a:hlinkClick r:id="rId5"/>
+              </a:rPr>
+              <a:t>Tejaswini Sharma</a:t>
+            </a:r>
+            <a:r>
+              <a:rPr/>
+              <a:t>, </a:t>
+            </a:r>
+            <a:r>
+              <a:rPr>
+                <a:hlinkClick r:id="rId6"/>
+              </a:rPr>
+              <a:t>David Rieger</a:t>
+            </a:r>
+            <a:r>
+              <a:rPr/>
+              <a:t>, </a:t>
+            </a:r>
+            <a:r>
+              <a:rPr>
+                <a:hlinkClick r:id="rId7"/>
+              </a:rPr>
+              <a:t>Elizabeth Waterfield</a:t>
+            </a:r>
+            <a:r>
+              <a:rPr/>
+              <a:t>, </a:t>
+            </a:r>
+            <a:r>
+              <a:rPr>
+                <a:hlinkClick r:id="rId8"/>
+              </a:rPr>
+              <a:t>Sara Lil Middleton</a:t>
+            </a:r>
+            <a:r>
+              <a:rPr/>
+              <a:t> and </a:t>
+            </a:r>
+            <a:r>
+              <a:rPr>
+                <a:hlinkClick r:id="rId9"/>
+              </a:rPr>
+              <a:t>Sarah von Grebmer zu Wolfsthurn</a:t>
+            </a:r>
+            <a:r>
+              <a:rPr/>
+              <a:t>. The current work is licensed under a </a:t>
+            </a:r>
+            <a:r>
+              <a:rPr>
+                <a:hlinkClick r:id="rId10"/>
+              </a:rPr>
               <a:t>Creative Commons Attribution 4.0 SA International License</a:t>
             </a:r>
             <a:r>
               <a:rPr/>
-              <a:t> (CC-BY-SA 4.0). Code snippets are dedicated to the public domain and licenced under a </a:t>
-            </a:r>
-            <a:r>
-              <a:rPr>
-                <a:hlinkClick r:id="rId5"/>
+              <a:t> (CC-BY-SA 4.0). Code snippets are dedicated to the public domain and are licensed under a </a:t>
+            </a:r>
+            <a:r>
+              <a:rPr>
+                <a:hlinkClick r:id="rId11"/>
               </a:rPr>
               <a:t>Creative Commons Universal Licence</a:t>
             </a:r>
             <a:r>
               <a:rPr/>
-              <a:t> (CC0 1.0)</a:t>
-            </a:r>
-          </a:p>
-          <a:p>
-            <a:pPr lvl="0" indent="0" marL="0">
-              <a:buNone/>
-            </a:pPr>
-            <a:r>
-              <a:rPr/>
-              <a:t>His work was subsequently adapted by </a:t>
-            </a:r>
-            <a:r>
-              <a:rPr>
-                <a:hlinkClick r:id="rId6"/>
-              </a:rPr>
-              <a:t>Caterina Luz Sanchez Steinhagen</a:t>
-            </a:r>
-            <a:r>
-              <a:rPr/>
-              <a:t>, </a:t>
-            </a:r>
-            <a:r>
-              <a:rPr>
-                <a:hlinkClick r:id="rId7"/>
-              </a:rPr>
-              <a:t>Tejaswini Sharma</a:t>
-            </a:r>
-            <a:r>
-              <a:rPr/>
-              <a:t>, </a:t>
-            </a:r>
-            <a:r>
-              <a:rPr>
-                <a:hlinkClick r:id="rId8"/>
-              </a:rPr>
-              <a:t>David Rieger</a:t>
-            </a:r>
-            <a:r>
-              <a:rPr/>
-              <a:t>, </a:t>
-            </a:r>
-            <a:r>
-              <a:rPr>
-                <a:hlinkClick r:id="rId9"/>
-              </a:rPr>
-              <a:t>Elizabeth Waterfield</a:t>
-            </a:r>
-            <a:r>
-              <a:rPr/>
-              <a:t>, </a:t>
-            </a:r>
-            <a:r>
-              <a:rPr>
-                <a:hlinkClick r:id="rId10"/>
-              </a:rPr>
-              <a:t>Sara Lil Middleton</a:t>
-            </a:r>
-            <a:r>
-              <a:rPr/>
-              <a:t> and </a:t>
-            </a:r>
-            <a:r>
-              <a:rPr>
-                <a:hlinkClick r:id="rId11"/>
-              </a:rPr>
-              <a:t>Sarah von Grebmer zu Wolfsthurn</a:t>
-            </a:r>
-            <a:r>
-              <a:rPr/>
-              <a:t>.</a:t>
+              <a:t> (CC0 1.0).</a:t>
             </a:r>
           </a:p>
           <a:p>
@@ -27359,7 +27350,7 @@
             </a:r>
             <a:r>
               <a:rPr i="1"/>
-              <a:t>Introduction to R</a:t>
+              <a:t>Introduction to R: Part I</a:t>
             </a:r>
             <a:r>
               <a:rPr/>

--- a/open-research-tools/r-part-I/r-part-I-slides.pptx
+++ b/open-research-tools/r-part-I/r-part-I-slides.pptx
@@ -11533,7 +11533,7 @@
             </a:pPr>
             <a:r>
               <a:rPr/>
-              <a:t>30/09/2026</a:t>
+              <a:t>01/10/2026</a:t>
             </a:r>
           </a:p>
         </p:txBody>

--- a/open-research-tools/r-part-I/r-part-I-slides.pptx
+++ b/open-research-tools/r-part-I/r-part-I-slides.pptx
@@ -11533,7 +11533,7 @@
             </a:pPr>
             <a:r>
               <a:rPr/>
-              <a:t>01/10/2026</a:t>
+              <a:t>05/10/2026</a:t>
             </a:r>
           </a:p>
         </p:txBody>

--- a/open-research-tools/r-part-I/r-part-I-slides.pptx
+++ b/open-research-tools/r-part-I/r-part-I-slides.pptx
@@ -11533,7 +11533,7 @@
             </a:pPr>
             <a:r>
               <a:rPr/>
-              <a:t>05/10/2026</a:t>
+              <a:t>08/10/2026</a:t>
             </a:r>
           </a:p>
         </p:txBody>

--- a/open-research-tools/r-part-I/r-part-I-slides.pptx
+++ b/open-research-tools/r-part-I/r-part-I-slides.pptx
@@ -11533,7 +11533,7 @@
             </a:pPr>
             <a:r>
               <a:rPr/>
-              <a:t>08/10/2026</a:t>
+              <a:t>12/10/2026</a:t>
             </a:r>
           </a:p>
         </p:txBody>

--- a/open-research-tools/r-part-I/r-part-I-slides.pptx
+++ b/open-research-tools/r-part-I/r-part-I-slides.pptx
@@ -11533,7 +11533,7 @@
             </a:pPr>
             <a:r>
               <a:rPr/>
-              <a:t>12/10/2026</a:t>
+              <a:t>13/10/2026</a:t>
             </a:r>
           </a:p>
         </p:txBody>

--- a/open-research-tools/r-part-I/r-part-I-slides.pptx
+++ b/open-research-tools/r-part-I/r-part-I-slides.pptx
@@ -11533,7 +11533,7 @@
             </a:pPr>
             <a:r>
               <a:rPr/>
-              <a:t>13/10/2026</a:t>
+              <a:t>14/10/2026</a:t>
             </a:r>
           </a:p>
         </p:txBody>

--- a/open-research-tools/r-part-I/r-part-I-slides.pptx
+++ b/open-research-tools/r-part-I/r-part-I-slides.pptx
@@ -11533,7 +11533,7 @@
             </a:pPr>
             <a:r>
               <a:rPr/>
-              <a:t>14/10/2026</a:t>
+              <a:t>19/10/2026</a:t>
             </a:r>
           </a:p>
         </p:txBody>

--- a/open-research-tools/r-part-I/r-part-I-slides.pptx
+++ b/open-research-tools/r-part-I/r-part-I-slides.pptx
@@ -27082,7 +27082,7 @@
               <a:rPr>
                 <a:hlinkClick r:id="rId3"/>
               </a:rPr>
-              <a:t>0000-0000-0000-0000</a:t>
+              <a:t>0009-0000-0305-9751</a:t>
             </a:r>
             <a:r>
               <a:rPr/>
@@ -27164,7 +27164,7 @@
             </a:pPr>
             <a:r>
               <a:rPr b="1"/>
-              <a:t>Reviewer</a:t>
+              <a:t>Consultant</a:t>
             </a:r>
             <a:r>
               <a:rPr/>

--- a/open-research-tools/r-part-I/r-part-I-slides.pptx
+++ b/open-research-tools/r-part-I/r-part-I-slides.pptx
@@ -11533,7 +11533,7 @@
             </a:pPr>
             <a:r>
               <a:rPr/>
-              <a:t>19/10/2026</a:t>
+              <a:t>22/10/2026</a:t>
             </a:r>
           </a:p>
         </p:txBody>

--- a/open-research-tools/r-part-I/r-part-I-slides.pptx
+++ b/open-research-tools/r-part-I/r-part-I-slides.pptx
@@ -11533,7 +11533,7 @@
             </a:pPr>
             <a:r>
               <a:rPr/>
-              <a:t>22/10/2026</a:t>
+              <a:t>26/10/2026</a:t>
             </a:r>
           </a:p>
         </p:txBody>

--- a/open-research-tools/r-part-I/r-part-I-slides.pptx
+++ b/open-research-tools/r-part-I/r-part-I-slides.pptx
@@ -11533,7 +11533,7 @@
             </a:pPr>
             <a:r>
               <a:rPr/>
-              <a:t>26/10/2026</a:t>
+              <a:t>29/10/2026</a:t>
             </a:r>
           </a:p>
         </p:txBody>
